--- a/docs/Disciplina/docs/aula07/projecoes.pptx
+++ b/docs/Disciplina/docs/aula07/projecoes.pptx
@@ -810,6 +810,9 @@
           <a:prstGeom prst="rect">
             <a:avLst/>
           </a:prstGeom>
+          <a:solidFill>
+            <a:srgbClr val="002454"/>
+          </a:solidFill>
         </p:spPr>
         <p:txBody>
           <a:bodyPr vert="horz" wrap="square" lIns="0" tIns="12700" rIns="0" bIns="0" rtlCol="0">
